--- a/languages/c/references/C语言-数据类型.pptx
+++ b/languages/c/references/C语言-数据类型.pptx
@@ -31,6 +31,8 @@
     <p:sldId id="288" r:id="rId25"/>
     <p:sldId id="260" r:id="rId26"/>
     <p:sldId id="287" r:id="rId27"/>
+    <p:sldId id="289" r:id="rId28"/>
+    <p:sldId id="290" r:id="rId29"/>
   </p:sldIdLst>
   <p:sldSz cx="12192000" cy="6858000"/>
   <p:notesSz cx="6858000" cy="9144000"/>
@@ -268,7 +270,7 @@
           <a:p>
             <a:fld id="{D4242620-96DC-49D9-87C2-1C2705F3C146}" type="datetimeFigureOut">
               <a:rPr lang="zh-CN" altLang="en-US" smtClean="0"/>
-              <a:t>2026/6/21</a:t>
+              <a:t>2026/6/26</a:t>
             </a:fld>
             <a:endParaRPr lang="zh-CN" altLang="en-US"/>
           </a:p>
@@ -438,7 +440,7 @@
           <a:p>
             <a:fld id="{D4242620-96DC-49D9-87C2-1C2705F3C146}" type="datetimeFigureOut">
               <a:rPr lang="zh-CN" altLang="en-US" smtClean="0"/>
-              <a:t>2026/6/21</a:t>
+              <a:t>2026/6/26</a:t>
             </a:fld>
             <a:endParaRPr lang="zh-CN" altLang="en-US"/>
           </a:p>
@@ -618,7 +620,7 @@
           <a:p>
             <a:fld id="{D4242620-96DC-49D9-87C2-1C2705F3C146}" type="datetimeFigureOut">
               <a:rPr lang="zh-CN" altLang="en-US" smtClean="0"/>
-              <a:t>2026/6/21</a:t>
+              <a:t>2026/6/26</a:t>
             </a:fld>
             <a:endParaRPr lang="zh-CN" altLang="en-US"/>
           </a:p>
@@ -788,7 +790,7 @@
           <a:p>
             <a:fld id="{D4242620-96DC-49D9-87C2-1C2705F3C146}" type="datetimeFigureOut">
               <a:rPr lang="zh-CN" altLang="en-US" smtClean="0"/>
-              <a:t>2026/6/21</a:t>
+              <a:t>2026/6/26</a:t>
             </a:fld>
             <a:endParaRPr lang="zh-CN" altLang="en-US"/>
           </a:p>
@@ -1034,7 +1036,7 @@
           <a:p>
             <a:fld id="{D4242620-96DC-49D9-87C2-1C2705F3C146}" type="datetimeFigureOut">
               <a:rPr lang="zh-CN" altLang="en-US" smtClean="0"/>
-              <a:t>2026/6/21</a:t>
+              <a:t>2026/6/26</a:t>
             </a:fld>
             <a:endParaRPr lang="zh-CN" altLang="en-US"/>
           </a:p>
@@ -1266,7 +1268,7 @@
           <a:p>
             <a:fld id="{D4242620-96DC-49D9-87C2-1C2705F3C146}" type="datetimeFigureOut">
               <a:rPr lang="zh-CN" altLang="en-US" smtClean="0"/>
-              <a:t>2026/6/21</a:t>
+              <a:t>2026/6/26</a:t>
             </a:fld>
             <a:endParaRPr lang="zh-CN" altLang="en-US"/>
           </a:p>
@@ -1633,7 +1635,7 @@
           <a:p>
             <a:fld id="{D4242620-96DC-49D9-87C2-1C2705F3C146}" type="datetimeFigureOut">
               <a:rPr lang="zh-CN" altLang="en-US" smtClean="0"/>
-              <a:t>2026/6/21</a:t>
+              <a:t>2026/6/26</a:t>
             </a:fld>
             <a:endParaRPr lang="zh-CN" altLang="en-US"/>
           </a:p>
@@ -1751,7 +1753,7 @@
           <a:p>
             <a:fld id="{D4242620-96DC-49D9-87C2-1C2705F3C146}" type="datetimeFigureOut">
               <a:rPr lang="zh-CN" altLang="en-US" smtClean="0"/>
-              <a:t>2026/6/21</a:t>
+              <a:t>2026/6/26</a:t>
             </a:fld>
             <a:endParaRPr lang="zh-CN" altLang="en-US"/>
           </a:p>
@@ -1846,7 +1848,7 @@
           <a:p>
             <a:fld id="{D4242620-96DC-49D9-87C2-1C2705F3C146}" type="datetimeFigureOut">
               <a:rPr lang="zh-CN" altLang="en-US" smtClean="0"/>
-              <a:t>2026/6/21</a:t>
+              <a:t>2026/6/26</a:t>
             </a:fld>
             <a:endParaRPr lang="zh-CN" altLang="en-US"/>
           </a:p>
@@ -2123,7 +2125,7 @@
           <a:p>
             <a:fld id="{D4242620-96DC-49D9-87C2-1C2705F3C146}" type="datetimeFigureOut">
               <a:rPr lang="zh-CN" altLang="en-US" smtClean="0"/>
-              <a:t>2026/6/21</a:t>
+              <a:t>2026/6/26</a:t>
             </a:fld>
             <a:endParaRPr lang="zh-CN" altLang="en-US"/>
           </a:p>
@@ -2376,7 +2378,7 @@
           <a:p>
             <a:fld id="{D4242620-96DC-49D9-87C2-1C2705F3C146}" type="datetimeFigureOut">
               <a:rPr lang="zh-CN" altLang="en-US" smtClean="0"/>
-              <a:t>2026/6/21</a:t>
+              <a:t>2026/6/26</a:t>
             </a:fld>
             <a:endParaRPr lang="zh-CN" altLang="en-US"/>
           </a:p>
@@ -2619,7 +2621,7 @@
           <a:p>
             <a:fld id="{D4242620-96DC-49D9-87C2-1C2705F3C146}" type="datetimeFigureOut">
               <a:rPr lang="zh-CN" altLang="en-US" smtClean="0"/>
-              <a:t>2026/6/21</a:t>
+              <a:t>2026/6/26</a:t>
             </a:fld>
             <a:endParaRPr lang="zh-CN" altLang="en-US"/>
           </a:p>
@@ -4722,7 +4724,15 @@
                 <a:ea typeface="Noto Sans SC"/>
                 <a:sym typeface="Noto Sans SC"/>
               </a:rPr>
-              <a:t>指针的定义</a:t>
+              <a:t>指针的</a:t>
+            </a:r>
+            <a:r>
+              <a:rPr lang="zh-CN" altLang="en-US" sz="3200" b="1" dirty="0" smtClean="0">
+                <a:latin typeface="Noto Sans SC"/>
+                <a:ea typeface="Noto Sans SC"/>
+                <a:sym typeface="Noto Sans SC"/>
+              </a:rPr>
+              <a:t>定义</a:t>
             </a:r>
             <a:endParaRPr lang="en-US" altLang="zh-CN" sz="3200" dirty="0"/>
           </a:p>
@@ -4796,7 +4806,7 @@
         <p:spPr>
           <a:xfrm>
             <a:off x="5795825" y="1662665"/>
-            <a:ext cx="6126714" cy="2585323"/>
+            <a:ext cx="6126714" cy="3139321"/>
           </a:xfrm>
           <a:prstGeom prst="rect">
             <a:avLst/>
@@ -4845,48 +4855,139 @@
           <a:p>
             <a:pPr lvl="1"/>
             <a:r>
-              <a:rPr lang="pt-BR" altLang="zh-CN" dirty="0" smtClean="0"/>
+              <a:rPr lang="pt-BR" altLang="zh-CN" dirty="0" smtClean="0">
+                <a:solidFill>
+                  <a:srgbClr val="FF0000"/>
+                </a:solidFill>
+              </a:rPr>
               <a:t>int *pa;     // </a:t>
             </a:r>
             <a:r>
-              <a:rPr lang="zh-CN" altLang="en-US" dirty="0" smtClean="0"/>
+              <a:rPr lang="zh-CN" altLang="en-US" dirty="0" smtClean="0">
+                <a:solidFill>
+                  <a:srgbClr val="FF0000"/>
+                </a:solidFill>
+              </a:rPr>
               <a:t>定义</a:t>
             </a:r>
             <a:r>
-              <a:rPr lang="pt-BR" altLang="zh-CN" dirty="0" smtClean="0"/>
+              <a:rPr lang="pt-BR" altLang="zh-CN" dirty="0" smtClean="0">
+                <a:solidFill>
+                  <a:srgbClr val="FF0000"/>
+                </a:solidFill>
+              </a:rPr>
               <a:t>int*</a:t>
             </a:r>
             <a:r>
-              <a:rPr lang="zh-CN" altLang="en-US" dirty="0" smtClean="0"/>
+              <a:rPr lang="zh-CN" altLang="en-US" dirty="0" smtClean="0">
+                <a:solidFill>
+                  <a:srgbClr val="FF0000"/>
+                </a:solidFill>
+              </a:rPr>
               <a:t>的指针变量 </a:t>
             </a:r>
             <a:r>
-              <a:rPr lang="pt-BR" altLang="zh-CN" dirty="0" smtClean="0"/>
+              <a:rPr lang="pt-BR" altLang="zh-CN" dirty="0" smtClean="0">
+                <a:solidFill>
+                  <a:srgbClr val="FF0000"/>
+                </a:solidFill>
+              </a:rPr>
               <a:t>pa </a:t>
             </a:r>
           </a:p>
           <a:p>
             <a:pPr lvl="1"/>
             <a:r>
-              <a:rPr lang="pt-BR" altLang="zh-CN" dirty="0" smtClean="0"/>
+              <a:rPr lang="pt-BR" altLang="zh-CN" dirty="0" smtClean="0">
+                <a:solidFill>
+                  <a:srgbClr val="FF0000"/>
+                </a:solidFill>
+              </a:rPr>
               <a:t>pa = &amp;a;     // </a:t>
             </a:r>
             <a:r>
-              <a:rPr lang="zh-CN" altLang="en-US" dirty="0" smtClean="0"/>
+              <a:rPr lang="zh-CN" altLang="en-US" dirty="0" smtClean="0">
+                <a:solidFill>
+                  <a:srgbClr val="FF0000"/>
+                </a:solidFill>
+              </a:rPr>
               <a:t>将</a:t>
             </a:r>
             <a:r>
-              <a:rPr lang="pt-BR" altLang="zh-CN" dirty="0" smtClean="0"/>
+              <a:rPr lang="pt-BR" altLang="zh-CN" dirty="0" smtClean="0">
+                <a:solidFill>
+                  <a:srgbClr val="FF0000"/>
+                </a:solidFill>
+              </a:rPr>
               <a:t>a</a:t>
             </a:r>
             <a:r>
-              <a:rPr lang="zh-CN" altLang="en-US" dirty="0" smtClean="0"/>
+              <a:rPr lang="zh-CN" altLang="en-US" dirty="0" smtClean="0">
+                <a:solidFill>
+                  <a:srgbClr val="FF0000"/>
+                </a:solidFill>
+              </a:rPr>
               <a:t>的地址赋值给</a:t>
             </a:r>
             <a:r>
-              <a:rPr lang="pt-BR" altLang="zh-CN" dirty="0" smtClean="0"/>
+              <a:rPr lang="pt-BR" altLang="zh-CN" dirty="0" smtClean="0">
+                <a:solidFill>
+                  <a:srgbClr val="FF0000"/>
+                </a:solidFill>
+              </a:rPr>
               <a:t>pa</a:t>
             </a:r>
+          </a:p>
+          <a:p>
+            <a:pPr lvl="1"/>
+            <a:r>
+              <a:rPr lang="pt-BR" altLang="zh-CN" dirty="0" smtClean="0">
+                <a:solidFill>
+                  <a:srgbClr val="FF0000"/>
+                </a:solidFill>
+              </a:rPr>
+              <a:t>*</a:t>
+            </a:r>
+            <a:r>
+              <a:rPr lang="en-US" altLang="zh-CN" dirty="0" smtClean="0">
+                <a:solidFill>
+                  <a:srgbClr val="FF0000"/>
+                </a:solidFill>
+              </a:rPr>
+              <a:t>pa = 33;</a:t>
+            </a:r>
+          </a:p>
+          <a:p>
+            <a:pPr lvl="1"/>
+            <a:r>
+              <a:rPr lang="en-US" altLang="zh-CN" dirty="0" err="1">
+                <a:solidFill>
+                  <a:srgbClr val="FF0000"/>
+                </a:solidFill>
+              </a:rPr>
+              <a:t>i</a:t>
+            </a:r>
+            <a:r>
+              <a:rPr lang="en-US" altLang="zh-CN" dirty="0" err="1" smtClean="0">
+                <a:solidFill>
+                  <a:srgbClr val="FF0000"/>
+                </a:solidFill>
+              </a:rPr>
+              <a:t>nt</a:t>
+            </a:r>
+            <a:r>
+              <a:rPr lang="en-US" altLang="zh-CN" dirty="0" smtClean="0">
+                <a:solidFill>
+                  <a:srgbClr val="FF0000"/>
+                </a:solidFill>
+              </a:rPr>
+              <a:t> c= *pa;</a:t>
+            </a:r>
+            <a:endParaRPr lang="pt-BR" altLang="zh-CN" dirty="0" smtClean="0">
+              <a:solidFill>
+                <a:srgbClr val="FF0000"/>
+              </a:solidFill>
+            </a:endParaRPr>
           </a:p>
           <a:p>
             <a:pPr lvl="1"/>
@@ -9009,7 +9110,7 @@
                 <a14:useLocalDpi xmlns:a14="http://schemas.microsoft.com/office/drawing/2010/main" val="0"/>
               </a:ext>
               <a:ext uri="{96DAC541-7B7A-43D3-8B79-37D633B846F1}">
-                <asvg:svgBlip xmlns:asvg="http://schemas.microsoft.com/office/drawing/2016/SVG/main" xmlns="" r:embed="rId6"/>
+                <asvg:svgBlip xmlns="" xmlns:asvg="http://schemas.microsoft.com/office/drawing/2016/SVG/main" r:embed="rId6"/>
               </a:ext>
             </a:extLst>
           </a:blip>
@@ -9222,7 +9323,7 @@
                 <a14:useLocalDpi xmlns:a14="http://schemas.microsoft.com/office/drawing/2010/main" val="0"/>
               </a:ext>
               <a:ext uri="{96DAC541-7B7A-43D3-8B79-37D633B846F1}">
-                <asvg:svgBlip xmlns:asvg="http://schemas.microsoft.com/office/drawing/2016/SVG/main" xmlns="" r:embed="rId8"/>
+                <asvg:svgBlip xmlns="" xmlns:asvg="http://schemas.microsoft.com/office/drawing/2016/SVG/main" r:embed="rId8"/>
               </a:ext>
             </a:extLst>
           </a:blip>
@@ -9435,7 +9536,7 @@
                 <a14:useLocalDpi xmlns:a14="http://schemas.microsoft.com/office/drawing/2010/main" val="0"/>
               </a:ext>
               <a:ext uri="{96DAC541-7B7A-43D3-8B79-37D633B846F1}">
-                <asvg:svgBlip xmlns:asvg="http://schemas.microsoft.com/office/drawing/2016/SVG/main" xmlns="" r:embed="rId10"/>
+                <asvg:svgBlip xmlns="" xmlns:asvg="http://schemas.microsoft.com/office/drawing/2016/SVG/main" r:embed="rId10"/>
               </a:ext>
             </a:extLst>
           </a:blip>
@@ -12287,6 +12388,1404 @@
 </p:sld>
 </file>
 
+<file path=ppt/slides/slide27.xml><?xml version="1.0" encoding="utf-8"?>
+<p:sld xmlns:a="http://schemas.openxmlformats.org/drawingml/2006/main" xmlns:r="http://schemas.openxmlformats.org/officeDocument/2006/relationships" xmlns:p="http://schemas.openxmlformats.org/presentationml/2006/main">
+  <p:cSld>
+    <p:spTree>
+      <p:nvGrpSpPr>
+        <p:cNvPr id="1" name=""/>
+        <p:cNvGrpSpPr/>
+        <p:nvPr/>
+      </p:nvGrpSpPr>
+      <p:grpSpPr>
+        <a:xfrm>
+          <a:off x="0" y="0"/>
+          <a:ext cx="0" cy="0"/>
+          <a:chOff x="0" y="0"/>
+          <a:chExt cx="0" cy="0"/>
+        </a:xfrm>
+      </p:grpSpPr>
+      <p:sp>
+        <p:nvSpPr>
+          <p:cNvPr id="2" name="标题 1"/>
+          <p:cNvSpPr>
+            <a:spLocks noGrp="1"/>
+          </p:cNvSpPr>
+          <p:nvPr>
+            <p:ph type="title"/>
+          </p:nvPr>
+        </p:nvSpPr>
+        <p:spPr>
+          <a:xfrm>
+            <a:off x="7312929" y="551807"/>
+            <a:ext cx="10515600" cy="1325563"/>
+          </a:xfrm>
+        </p:spPr>
+        <p:txBody>
+          <a:bodyPr/>
+          <a:lstStyle/>
+          <a:p>
+            <a:r>
+              <a:rPr lang="en-US" altLang="zh-CN" dirty="0"/>
+              <a:t>7</a:t>
+            </a:r>
+            <a:endParaRPr lang="zh-CN" altLang="en-US" dirty="0"/>
+          </a:p>
+        </p:txBody>
+      </p:sp>
+      <p:cxnSp>
+        <p:nvCxnSpPr>
+          <p:cNvPr id="4" name="肘形连接符 3"/>
+          <p:cNvCxnSpPr/>
+          <p:nvPr/>
+        </p:nvCxnSpPr>
+        <p:spPr>
+          <a:xfrm>
+            <a:off x="6465796" y="768914"/>
+            <a:ext cx="1520687" cy="885619"/>
+          </a:xfrm>
+          <a:prstGeom prst="bentConnector3">
+            <a:avLst/>
+          </a:prstGeom>
+        </p:spPr>
+        <p:style>
+          <a:lnRef idx="1">
+            <a:schemeClr val="accent1"/>
+          </a:lnRef>
+          <a:fillRef idx="0">
+            <a:schemeClr val="accent1"/>
+          </a:fillRef>
+          <a:effectRef idx="0">
+            <a:schemeClr val="accent1"/>
+          </a:effectRef>
+          <a:fontRef idx="minor">
+            <a:schemeClr val="tx1"/>
+          </a:fontRef>
+        </p:style>
+      </p:cxnSp>
+      <p:sp>
+        <p:nvSpPr>
+          <p:cNvPr id="5" name="文本框 4"/>
+          <p:cNvSpPr txBox="1"/>
+          <p:nvPr/>
+        </p:nvSpPr>
+        <p:spPr>
+          <a:xfrm>
+            <a:off x="6603250" y="1027057"/>
+            <a:ext cx="306494" cy="369332"/>
+          </a:xfrm>
+          <a:prstGeom prst="rect">
+            <a:avLst/>
+          </a:prstGeom>
+          <a:noFill/>
+        </p:spPr>
+        <p:txBody>
+          <a:bodyPr wrap="none" rtlCol="0">
+            <a:spAutoFit/>
+          </a:bodyPr>
+          <a:lstStyle/>
+          <a:p>
+            <a:r>
+              <a:rPr lang="en-US" altLang="zh-CN" dirty="0" smtClean="0"/>
+              <a:t>2</a:t>
+            </a:r>
+            <a:endParaRPr lang="zh-CN" altLang="en-US" dirty="0"/>
+          </a:p>
+        </p:txBody>
+      </p:sp>
+      <p:sp>
+        <p:nvSpPr>
+          <p:cNvPr id="6" name="文本框 5"/>
+          <p:cNvSpPr txBox="1"/>
+          <p:nvPr/>
+        </p:nvSpPr>
+        <p:spPr>
+          <a:xfrm>
+            <a:off x="7390135" y="1863636"/>
+            <a:ext cx="306494" cy="369332"/>
+          </a:xfrm>
+          <a:prstGeom prst="rect">
+            <a:avLst/>
+          </a:prstGeom>
+          <a:noFill/>
+        </p:spPr>
+        <p:txBody>
+          <a:bodyPr wrap="none" rtlCol="0">
+            <a:spAutoFit/>
+          </a:bodyPr>
+          <a:lstStyle/>
+          <a:p>
+            <a:r>
+              <a:rPr lang="en-US" altLang="zh-CN" dirty="0" smtClean="0"/>
+              <a:t>3</a:t>
+            </a:r>
+            <a:endParaRPr lang="zh-CN" altLang="en-US" dirty="0"/>
+          </a:p>
+        </p:txBody>
+      </p:sp>
+      <p:sp>
+        <p:nvSpPr>
+          <p:cNvPr id="7" name="文本框 6"/>
+          <p:cNvSpPr txBox="1"/>
+          <p:nvPr/>
+        </p:nvSpPr>
+        <p:spPr>
+          <a:xfrm>
+            <a:off x="8431277" y="1863636"/>
+            <a:ext cx="306494" cy="369332"/>
+          </a:xfrm>
+          <a:prstGeom prst="rect">
+            <a:avLst/>
+          </a:prstGeom>
+          <a:noFill/>
+        </p:spPr>
+        <p:txBody>
+          <a:bodyPr wrap="none" rtlCol="0">
+            <a:spAutoFit/>
+          </a:bodyPr>
+          <a:lstStyle/>
+          <a:p>
+            <a:r>
+              <a:rPr lang="en-US" altLang="zh-CN" dirty="0" smtClean="0"/>
+              <a:t>1</a:t>
+            </a:r>
+            <a:endParaRPr lang="zh-CN" altLang="en-US" dirty="0"/>
+          </a:p>
+        </p:txBody>
+      </p:sp>
+      <p:cxnSp>
+        <p:nvCxnSpPr>
+          <p:cNvPr id="8" name="肘形连接符 7"/>
+          <p:cNvCxnSpPr/>
+          <p:nvPr/>
+        </p:nvCxnSpPr>
+        <p:spPr>
+          <a:xfrm>
+            <a:off x="6688616" y="1654532"/>
+            <a:ext cx="1520687" cy="885619"/>
+          </a:xfrm>
+          <a:prstGeom prst="bentConnector3">
+            <a:avLst/>
+          </a:prstGeom>
+        </p:spPr>
+        <p:style>
+          <a:lnRef idx="1">
+            <a:schemeClr val="accent1"/>
+          </a:lnRef>
+          <a:fillRef idx="0">
+            <a:schemeClr val="accent1"/>
+          </a:fillRef>
+          <a:effectRef idx="0">
+            <a:schemeClr val="accent1"/>
+          </a:effectRef>
+          <a:fontRef idx="minor">
+            <a:schemeClr val="tx1"/>
+          </a:fontRef>
+        </p:style>
+      </p:cxnSp>
+      <p:sp>
+        <p:nvSpPr>
+          <p:cNvPr id="9" name="文本框 8"/>
+          <p:cNvSpPr txBox="1"/>
+          <p:nvPr/>
+        </p:nvSpPr>
+        <p:spPr>
+          <a:xfrm>
+            <a:off x="6912172" y="1878679"/>
+            <a:ext cx="306494" cy="369332"/>
+          </a:xfrm>
+          <a:prstGeom prst="rect">
+            <a:avLst/>
+          </a:prstGeom>
+          <a:noFill/>
+        </p:spPr>
+        <p:txBody>
+          <a:bodyPr wrap="none" rtlCol="0">
+            <a:spAutoFit/>
+          </a:bodyPr>
+          <a:lstStyle/>
+          <a:p>
+            <a:r>
+              <a:rPr lang="en-US" altLang="zh-CN" dirty="0" smtClean="0"/>
+              <a:t>2</a:t>
+            </a:r>
+            <a:endParaRPr lang="zh-CN" altLang="en-US" dirty="0"/>
+          </a:p>
+        </p:txBody>
+      </p:sp>
+      <p:sp>
+        <p:nvSpPr>
+          <p:cNvPr id="10" name="文本框 9"/>
+          <p:cNvSpPr txBox="1"/>
+          <p:nvPr/>
+        </p:nvSpPr>
+        <p:spPr>
+          <a:xfrm>
+            <a:off x="7679989" y="2749254"/>
+            <a:ext cx="306494" cy="369332"/>
+          </a:xfrm>
+          <a:prstGeom prst="rect">
+            <a:avLst/>
+          </a:prstGeom>
+          <a:noFill/>
+        </p:spPr>
+        <p:txBody>
+          <a:bodyPr wrap="none" rtlCol="0">
+            <a:spAutoFit/>
+          </a:bodyPr>
+          <a:lstStyle/>
+          <a:p>
+            <a:r>
+              <a:rPr lang="en-US" altLang="zh-CN" dirty="0" smtClean="0">
+                <a:solidFill>
+                  <a:srgbClr val="FF0000"/>
+                </a:solidFill>
+              </a:rPr>
+              <a:t>1</a:t>
+            </a:r>
+            <a:endParaRPr lang="zh-CN" altLang="en-US" dirty="0">
+              <a:solidFill>
+                <a:srgbClr val="FF0000"/>
+              </a:solidFill>
+            </a:endParaRPr>
+          </a:p>
+        </p:txBody>
+      </p:sp>
+      <p:sp>
+        <p:nvSpPr>
+          <p:cNvPr id="11" name="文本框 10"/>
+          <p:cNvSpPr txBox="1"/>
+          <p:nvPr/>
+        </p:nvSpPr>
+        <p:spPr>
+          <a:xfrm>
+            <a:off x="8431277" y="2685689"/>
+            <a:ext cx="306494" cy="369332"/>
+          </a:xfrm>
+          <a:prstGeom prst="rect">
+            <a:avLst/>
+          </a:prstGeom>
+          <a:noFill/>
+        </p:spPr>
+        <p:txBody>
+          <a:bodyPr wrap="none" rtlCol="0">
+            <a:spAutoFit/>
+          </a:bodyPr>
+          <a:lstStyle/>
+          <a:p>
+            <a:r>
+              <a:rPr lang="en-US" altLang="zh-CN" dirty="0" smtClean="0"/>
+              <a:t>1</a:t>
+            </a:r>
+            <a:endParaRPr lang="zh-CN" altLang="en-US" dirty="0"/>
+          </a:p>
+        </p:txBody>
+      </p:sp>
+      <p:cxnSp>
+        <p:nvCxnSpPr>
+          <p:cNvPr id="20" name="肘形连接符 19"/>
+          <p:cNvCxnSpPr/>
+          <p:nvPr/>
+        </p:nvCxnSpPr>
+        <p:spPr>
+          <a:xfrm>
+            <a:off x="2549630" y="1027057"/>
+            <a:ext cx="1520687" cy="885619"/>
+          </a:xfrm>
+          <a:prstGeom prst="bentConnector3">
+            <a:avLst/>
+          </a:prstGeom>
+        </p:spPr>
+        <p:style>
+          <a:lnRef idx="1">
+            <a:schemeClr val="accent1"/>
+          </a:lnRef>
+          <a:fillRef idx="0">
+            <a:schemeClr val="accent1"/>
+          </a:fillRef>
+          <a:effectRef idx="0">
+            <a:schemeClr val="accent1"/>
+          </a:effectRef>
+          <a:fontRef idx="minor">
+            <a:schemeClr val="tx1"/>
+          </a:fontRef>
+        </p:style>
+      </p:cxnSp>
+      <p:sp>
+        <p:nvSpPr>
+          <p:cNvPr id="21" name="文本框 20"/>
+          <p:cNvSpPr txBox="1"/>
+          <p:nvPr/>
+        </p:nvSpPr>
+        <p:spPr>
+          <a:xfrm>
+            <a:off x="2687084" y="1285200"/>
+            <a:ext cx="306494" cy="369332"/>
+          </a:xfrm>
+          <a:prstGeom prst="rect">
+            <a:avLst/>
+          </a:prstGeom>
+          <a:noFill/>
+        </p:spPr>
+        <p:txBody>
+          <a:bodyPr wrap="none" rtlCol="0">
+            <a:spAutoFit/>
+          </a:bodyPr>
+          <a:lstStyle/>
+          <a:p>
+            <a:r>
+              <a:rPr lang="en-US" altLang="zh-CN" dirty="0" smtClean="0"/>
+              <a:t>2</a:t>
+            </a:r>
+            <a:endParaRPr lang="zh-CN" altLang="en-US" dirty="0"/>
+          </a:p>
+        </p:txBody>
+      </p:sp>
+      <p:sp>
+        <p:nvSpPr>
+          <p:cNvPr id="22" name="文本框 21"/>
+          <p:cNvSpPr txBox="1"/>
+          <p:nvPr/>
+        </p:nvSpPr>
+        <p:spPr>
+          <a:xfrm>
+            <a:off x="3473969" y="2121779"/>
+            <a:ext cx="306494" cy="369332"/>
+          </a:xfrm>
+          <a:prstGeom prst="rect">
+            <a:avLst/>
+          </a:prstGeom>
+          <a:noFill/>
+        </p:spPr>
+        <p:txBody>
+          <a:bodyPr wrap="none" rtlCol="0">
+            <a:spAutoFit/>
+          </a:bodyPr>
+          <a:lstStyle/>
+          <a:p>
+            <a:r>
+              <a:rPr lang="en-US" altLang="zh-CN" dirty="0" smtClean="0"/>
+              <a:t>2</a:t>
+            </a:r>
+            <a:endParaRPr lang="zh-CN" altLang="en-US" dirty="0"/>
+          </a:p>
+        </p:txBody>
+      </p:sp>
+      <p:sp>
+        <p:nvSpPr>
+          <p:cNvPr id="23" name="文本框 22"/>
+          <p:cNvSpPr txBox="1"/>
+          <p:nvPr/>
+        </p:nvSpPr>
+        <p:spPr>
+          <a:xfrm>
+            <a:off x="4515111" y="2121779"/>
+            <a:ext cx="306494" cy="369332"/>
+          </a:xfrm>
+          <a:prstGeom prst="rect">
+            <a:avLst/>
+          </a:prstGeom>
+          <a:noFill/>
+        </p:spPr>
+        <p:txBody>
+          <a:bodyPr wrap="none" rtlCol="0">
+            <a:spAutoFit/>
+          </a:bodyPr>
+          <a:lstStyle/>
+          <a:p>
+            <a:r>
+              <a:rPr lang="en-US" altLang="zh-CN" dirty="0" smtClean="0"/>
+              <a:t>0</a:t>
+            </a:r>
+            <a:endParaRPr lang="zh-CN" altLang="en-US" dirty="0"/>
+          </a:p>
+        </p:txBody>
+      </p:sp>
+      <p:cxnSp>
+        <p:nvCxnSpPr>
+          <p:cNvPr id="24" name="肘形连接符 23"/>
+          <p:cNvCxnSpPr/>
+          <p:nvPr/>
+        </p:nvCxnSpPr>
+        <p:spPr>
+          <a:xfrm>
+            <a:off x="2549629" y="1863635"/>
+            <a:ext cx="1520687" cy="885619"/>
+          </a:xfrm>
+          <a:prstGeom prst="bentConnector3">
+            <a:avLst/>
+          </a:prstGeom>
+        </p:spPr>
+        <p:style>
+          <a:lnRef idx="1">
+            <a:schemeClr val="accent1"/>
+          </a:lnRef>
+          <a:fillRef idx="0">
+            <a:schemeClr val="accent1"/>
+          </a:fillRef>
+          <a:effectRef idx="0">
+            <a:schemeClr val="accent1"/>
+          </a:effectRef>
+          <a:fontRef idx="minor">
+            <a:schemeClr val="tx1"/>
+          </a:fontRef>
+        </p:style>
+      </p:cxnSp>
+      <p:sp>
+        <p:nvSpPr>
+          <p:cNvPr id="25" name="文本框 24"/>
+          <p:cNvSpPr txBox="1"/>
+          <p:nvPr/>
+        </p:nvSpPr>
+        <p:spPr>
+          <a:xfrm>
+            <a:off x="2996006" y="2136822"/>
+            <a:ext cx="306494" cy="369332"/>
+          </a:xfrm>
+          <a:prstGeom prst="rect">
+            <a:avLst/>
+          </a:prstGeom>
+          <a:noFill/>
+        </p:spPr>
+        <p:txBody>
+          <a:bodyPr wrap="none" rtlCol="0">
+            <a:spAutoFit/>
+          </a:bodyPr>
+          <a:lstStyle/>
+          <a:p>
+            <a:r>
+              <a:rPr lang="en-US" altLang="zh-CN" dirty="0" smtClean="0"/>
+              <a:t>2</a:t>
+            </a:r>
+            <a:endParaRPr lang="zh-CN" altLang="en-US" dirty="0"/>
+          </a:p>
+        </p:txBody>
+      </p:sp>
+      <p:sp>
+        <p:nvSpPr>
+          <p:cNvPr id="26" name="文本框 25"/>
+          <p:cNvSpPr txBox="1"/>
+          <p:nvPr/>
+        </p:nvSpPr>
+        <p:spPr>
+          <a:xfrm>
+            <a:off x="3763823" y="3007397"/>
+            <a:ext cx="306494" cy="369332"/>
+          </a:xfrm>
+          <a:prstGeom prst="rect">
+            <a:avLst/>
+          </a:prstGeom>
+          <a:noFill/>
+        </p:spPr>
+        <p:txBody>
+          <a:bodyPr wrap="none" rtlCol="0">
+            <a:spAutoFit/>
+          </a:bodyPr>
+          <a:lstStyle/>
+          <a:p>
+            <a:r>
+              <a:rPr lang="en-US" altLang="zh-CN" dirty="0" smtClean="0"/>
+              <a:t>1</a:t>
+            </a:r>
+            <a:endParaRPr lang="zh-CN" altLang="en-US" dirty="0"/>
+          </a:p>
+        </p:txBody>
+      </p:sp>
+      <p:sp>
+        <p:nvSpPr>
+          <p:cNvPr id="27" name="文本框 26"/>
+          <p:cNvSpPr txBox="1"/>
+          <p:nvPr/>
+        </p:nvSpPr>
+        <p:spPr>
+          <a:xfrm>
+            <a:off x="4515111" y="2933920"/>
+            <a:ext cx="306494" cy="369332"/>
+          </a:xfrm>
+          <a:prstGeom prst="rect">
+            <a:avLst/>
+          </a:prstGeom>
+          <a:noFill/>
+        </p:spPr>
+        <p:txBody>
+          <a:bodyPr wrap="none" rtlCol="0">
+            <a:spAutoFit/>
+          </a:bodyPr>
+          <a:lstStyle/>
+          <a:p>
+            <a:r>
+              <a:rPr lang="en-US" altLang="zh-CN" dirty="0" smtClean="0"/>
+              <a:t>0</a:t>
+            </a:r>
+            <a:endParaRPr lang="zh-CN" altLang="en-US" dirty="0"/>
+          </a:p>
+        </p:txBody>
+      </p:sp>
+      <p:sp>
+        <p:nvSpPr>
+          <p:cNvPr id="28" name="标题 1"/>
+          <p:cNvSpPr txBox="1">
+            <a:spLocks/>
+          </p:cNvSpPr>
+          <p:nvPr/>
+        </p:nvSpPr>
+        <p:spPr>
+          <a:xfrm>
+            <a:off x="3396763" y="771778"/>
+            <a:ext cx="10515600" cy="1325563"/>
+          </a:xfrm>
+          <a:prstGeom prst="rect">
+            <a:avLst/>
+          </a:prstGeom>
+        </p:spPr>
+        <p:txBody>
+          <a:bodyPr vert="horz" lIns="91440" tIns="45720" rIns="91440" bIns="45720" rtlCol="0" anchor="ctr">
+            <a:normAutofit/>
+          </a:bodyPr>
+          <a:lstStyle>
+            <a:lvl1pPr algn="l" defTabSz="914400" rtl="0" eaLnBrk="1" latinLnBrk="0" hangingPunct="1">
+              <a:lnSpc>
+                <a:spcPct val="90000"/>
+              </a:lnSpc>
+              <a:spcBef>
+                <a:spcPct val="0"/>
+              </a:spcBef>
+              <a:buNone/>
+              <a:defRPr sz="4400" kern="1200">
+                <a:solidFill>
+                  <a:schemeClr val="tx1"/>
+                </a:solidFill>
+                <a:latin typeface="+mj-lt"/>
+                <a:ea typeface="+mj-ea"/>
+                <a:cs typeface="+mj-cs"/>
+              </a:defRPr>
+            </a:lvl1pPr>
+          </a:lstStyle>
+          <a:p>
+            <a:r>
+              <a:rPr lang="en-US" altLang="zh-CN" dirty="0" smtClean="0"/>
+              <a:t>4</a:t>
+            </a:r>
+            <a:endParaRPr lang="zh-CN" altLang="en-US" dirty="0"/>
+          </a:p>
+        </p:txBody>
+      </p:sp>
+      <p:sp>
+        <p:nvSpPr>
+          <p:cNvPr id="29" name="右箭头 28"/>
+          <p:cNvSpPr/>
+          <p:nvPr/>
+        </p:nvSpPr>
+        <p:spPr>
+          <a:xfrm>
+            <a:off x="3780463" y="3303252"/>
+            <a:ext cx="1087120" cy="429977"/>
+          </a:xfrm>
+          <a:prstGeom prst="rightArrow">
+            <a:avLst/>
+          </a:prstGeom>
+        </p:spPr>
+        <p:style>
+          <a:lnRef idx="2">
+            <a:schemeClr val="accent1">
+              <a:shade val="50000"/>
+            </a:schemeClr>
+          </a:lnRef>
+          <a:fillRef idx="1">
+            <a:schemeClr val="accent1"/>
+          </a:fillRef>
+          <a:effectRef idx="0">
+            <a:schemeClr val="accent1"/>
+          </a:effectRef>
+          <a:fontRef idx="minor">
+            <a:schemeClr val="lt1"/>
+          </a:fontRef>
+        </p:style>
+        <p:txBody>
+          <a:bodyPr rtlCol="0" anchor="ctr"/>
+          <a:lstStyle/>
+          <a:p>
+            <a:pPr algn="ctr"/>
+            <a:endParaRPr lang="zh-CN" altLang="en-US"/>
+          </a:p>
+        </p:txBody>
+      </p:sp>
+      <p:sp>
+        <p:nvSpPr>
+          <p:cNvPr id="30" name="文本框 29"/>
+          <p:cNvSpPr txBox="1"/>
+          <p:nvPr/>
+        </p:nvSpPr>
+        <p:spPr>
+          <a:xfrm flipH="1">
+            <a:off x="8285389" y="1320205"/>
+            <a:ext cx="1060190" cy="369332"/>
+          </a:xfrm>
+          <a:prstGeom prst="rect">
+            <a:avLst/>
+          </a:prstGeom>
+          <a:noFill/>
+        </p:spPr>
+        <p:txBody>
+          <a:bodyPr wrap="square" rtlCol="0">
+            <a:spAutoFit/>
+          </a:bodyPr>
+          <a:lstStyle/>
+          <a:p>
+            <a:r>
+              <a:rPr lang="zh-CN" altLang="en-US" dirty="0"/>
+              <a:t>余数</a:t>
+            </a:r>
+          </a:p>
+        </p:txBody>
+      </p:sp>
+      <p:sp>
+        <p:nvSpPr>
+          <p:cNvPr id="31" name="文本框 30"/>
+          <p:cNvSpPr txBox="1"/>
+          <p:nvPr/>
+        </p:nvSpPr>
+        <p:spPr>
+          <a:xfrm flipH="1">
+            <a:off x="4518633" y="1683443"/>
+            <a:ext cx="1060190" cy="369332"/>
+          </a:xfrm>
+          <a:prstGeom prst="rect">
+            <a:avLst/>
+          </a:prstGeom>
+          <a:noFill/>
+        </p:spPr>
+        <p:txBody>
+          <a:bodyPr wrap="square" rtlCol="0">
+            <a:spAutoFit/>
+          </a:bodyPr>
+          <a:lstStyle/>
+          <a:p>
+            <a:r>
+              <a:rPr lang="zh-CN" altLang="en-US" dirty="0"/>
+              <a:t>余数</a:t>
+            </a:r>
+          </a:p>
+        </p:txBody>
+      </p:sp>
+      <p:sp>
+        <p:nvSpPr>
+          <p:cNvPr id="32" name="文本框 31"/>
+          <p:cNvSpPr txBox="1"/>
+          <p:nvPr/>
+        </p:nvSpPr>
+        <p:spPr>
+          <a:xfrm>
+            <a:off x="2549629" y="4495800"/>
+            <a:ext cx="3611886" cy="369332"/>
+          </a:xfrm>
+          <a:prstGeom prst="rect">
+            <a:avLst/>
+          </a:prstGeom>
+          <a:noFill/>
+        </p:spPr>
+        <p:txBody>
+          <a:bodyPr wrap="none" rtlCol="0">
+            <a:spAutoFit/>
+          </a:bodyPr>
+          <a:lstStyle/>
+          <a:p>
+            <a:r>
+              <a:rPr lang="en-US" altLang="zh-CN" dirty="0" smtClean="0"/>
+              <a:t>1 2 4 8 16 32 64 128 256 512 1024</a:t>
+            </a:r>
+          </a:p>
+        </p:txBody>
+      </p:sp>
+      <p:sp>
+        <p:nvSpPr>
+          <p:cNvPr id="33" name="上箭头 32"/>
+          <p:cNvSpPr/>
+          <p:nvPr/>
+        </p:nvSpPr>
+        <p:spPr>
+          <a:xfrm>
+            <a:off x="5048728" y="1803400"/>
+            <a:ext cx="666272" cy="1251621"/>
+          </a:xfrm>
+          <a:prstGeom prst="upArrow">
+            <a:avLst/>
+          </a:prstGeom>
+        </p:spPr>
+        <p:style>
+          <a:lnRef idx="2">
+            <a:schemeClr val="accent1">
+              <a:shade val="50000"/>
+            </a:schemeClr>
+          </a:lnRef>
+          <a:fillRef idx="1">
+            <a:schemeClr val="accent1"/>
+          </a:fillRef>
+          <a:effectRef idx="0">
+            <a:schemeClr val="accent1"/>
+          </a:effectRef>
+          <a:fontRef idx="minor">
+            <a:schemeClr val="lt1"/>
+          </a:fontRef>
+        </p:style>
+        <p:txBody>
+          <a:bodyPr rtlCol="0" anchor="ctr"/>
+          <a:lstStyle/>
+          <a:p>
+            <a:pPr algn="ctr"/>
+            <a:endParaRPr lang="zh-CN" altLang="en-US"/>
+          </a:p>
+        </p:txBody>
+      </p:sp>
+    </p:spTree>
+    <p:extLst>
+      <p:ext uri="{BB962C8B-B14F-4D97-AF65-F5344CB8AC3E}">
+        <p14:creationId xmlns:p14="http://schemas.microsoft.com/office/powerpoint/2010/main" val="1238279103"/>
+      </p:ext>
+    </p:extLst>
+  </p:cSld>
+  <p:clrMapOvr>
+    <a:masterClrMapping/>
+  </p:clrMapOvr>
+</p:sld>
+</file>
+
+<file path=ppt/slides/slide28.xml><?xml version="1.0" encoding="utf-8"?>
+<p:sld xmlns:a="http://schemas.openxmlformats.org/drawingml/2006/main" xmlns:r="http://schemas.openxmlformats.org/officeDocument/2006/relationships" xmlns:p="http://schemas.openxmlformats.org/presentationml/2006/main">
+  <p:cSld>
+    <p:spTree>
+      <p:nvGrpSpPr>
+        <p:cNvPr id="1" name=""/>
+        <p:cNvGrpSpPr/>
+        <p:nvPr/>
+      </p:nvGrpSpPr>
+      <p:grpSpPr>
+        <a:xfrm>
+          <a:off x="0" y="0"/>
+          <a:ext cx="0" cy="0"/>
+          <a:chOff x="0" y="0"/>
+          <a:chExt cx="0" cy="0"/>
+        </a:xfrm>
+      </p:grpSpPr>
+      <p:graphicFrame>
+        <p:nvGraphicFramePr>
+          <p:cNvPr id="3" name="表格 2"/>
+          <p:cNvGraphicFramePr>
+            <a:graphicFrameLocks noGrp="1"/>
+          </p:cNvGraphicFramePr>
+          <p:nvPr>
+            <p:extLst>
+              <p:ext uri="{D42A27DB-BD31-4B8C-83A1-F6EECF244321}">
+                <p14:modId xmlns:p14="http://schemas.microsoft.com/office/powerpoint/2010/main" val="2137902423"/>
+              </p:ext>
+            </p:extLst>
+          </p:nvPr>
+        </p:nvGraphicFramePr>
+        <p:xfrm>
+          <a:off x="1286933" y="1583265"/>
+          <a:ext cx="8128000" cy="1112520"/>
+        </p:xfrm>
+        <a:graphic>
+          <a:graphicData uri="http://schemas.openxmlformats.org/drawingml/2006/table">
+            <a:tbl>
+              <a:tblPr firstRow="1" bandRow="1">
+                <a:tableStyleId>{5C22544A-7EE6-4342-B048-85BDC9FD1C3A}</a:tableStyleId>
+              </a:tblPr>
+              <a:tblGrid>
+                <a:gridCol w="2032000">
+                  <a:extLst>
+                    <a:ext uri="{9D8B030D-6E8A-4147-A177-3AD203B41FA5}">
+                      <a16:colId xmlns:a16="http://schemas.microsoft.com/office/drawing/2014/main" val="296128195"/>
+                    </a:ext>
+                  </a:extLst>
+                </a:gridCol>
+                <a:gridCol w="2032000">
+                  <a:extLst>
+                    <a:ext uri="{9D8B030D-6E8A-4147-A177-3AD203B41FA5}">
+                      <a16:colId xmlns:a16="http://schemas.microsoft.com/office/drawing/2014/main" val="1485033215"/>
+                    </a:ext>
+                  </a:extLst>
+                </a:gridCol>
+                <a:gridCol w="2032000">
+                  <a:extLst>
+                    <a:ext uri="{9D8B030D-6E8A-4147-A177-3AD203B41FA5}">
+                      <a16:colId xmlns:a16="http://schemas.microsoft.com/office/drawing/2014/main" val="835095183"/>
+                    </a:ext>
+                  </a:extLst>
+                </a:gridCol>
+                <a:gridCol w="2032000">
+                  <a:extLst>
+                    <a:ext uri="{9D8B030D-6E8A-4147-A177-3AD203B41FA5}">
+                      <a16:colId xmlns:a16="http://schemas.microsoft.com/office/drawing/2014/main" val="2882123859"/>
+                    </a:ext>
+                  </a:extLst>
+                </a:gridCol>
+              </a:tblGrid>
+              <a:tr h="370840">
+                <a:tc>
+                  <a:txBody>
+                    <a:bodyPr/>
+                    <a:lstStyle/>
+                    <a:p>
+                      <a:r>
+                        <a:rPr lang="en-US" altLang="zh-CN" dirty="0" smtClean="0"/>
+                        <a:t>3</a:t>
+                      </a:r>
+                      <a:endParaRPr lang="zh-CN" altLang="en-US" dirty="0"/>
+                    </a:p>
+                  </a:txBody>
+                  <a:tcPr/>
+                </a:tc>
+                <a:tc>
+                  <a:txBody>
+                    <a:bodyPr/>
+                    <a:lstStyle/>
+                    <a:p>
+                      <a:r>
+                        <a:rPr lang="en-US" altLang="zh-CN" dirty="0" smtClean="0">
+                          <a:solidFill>
+                            <a:schemeClr val="accent2"/>
+                          </a:solidFill>
+                        </a:rPr>
+                        <a:t>0</a:t>
+                      </a:r>
+                      <a:endParaRPr lang="zh-CN" altLang="en-US" dirty="0">
+                        <a:solidFill>
+                          <a:schemeClr val="accent2"/>
+                        </a:solidFill>
+                      </a:endParaRPr>
+                    </a:p>
+                  </a:txBody>
+                  <a:tcPr/>
+                </a:tc>
+                <a:tc>
+                  <a:txBody>
+                    <a:bodyPr/>
+                    <a:lstStyle/>
+                    <a:p>
+                      <a:r>
+                        <a:rPr lang="en-US" altLang="zh-CN" dirty="0" smtClean="0"/>
+                        <a:t>1</a:t>
+                      </a:r>
+                      <a:endParaRPr lang="zh-CN" altLang="en-US" dirty="0"/>
+                    </a:p>
+                  </a:txBody>
+                  <a:tcPr/>
+                </a:tc>
+                <a:tc>
+                  <a:txBody>
+                    <a:bodyPr/>
+                    <a:lstStyle/>
+                    <a:p>
+                      <a:r>
+                        <a:rPr lang="en-US" altLang="zh-CN" dirty="0" smtClean="0">
+                          <a:solidFill>
+                            <a:schemeClr val="accent2"/>
+                          </a:solidFill>
+                        </a:rPr>
+                        <a:t>1</a:t>
+                      </a:r>
+                      <a:endParaRPr lang="zh-CN" altLang="en-US" dirty="0">
+                        <a:solidFill>
+                          <a:schemeClr val="accent2"/>
+                        </a:solidFill>
+                      </a:endParaRPr>
+                    </a:p>
+                  </a:txBody>
+                  <a:tcPr/>
+                </a:tc>
+                <a:extLst>
+                  <a:ext uri="{0D108BD9-81ED-4DB2-BD59-A6C34878D82A}">
+                    <a16:rowId xmlns:a16="http://schemas.microsoft.com/office/drawing/2014/main" val="2583744908"/>
+                  </a:ext>
+                </a:extLst>
+              </a:tr>
+              <a:tr h="370840">
+                <a:tc>
+                  <a:txBody>
+                    <a:bodyPr/>
+                    <a:lstStyle/>
+                    <a:p>
+                      <a:r>
+                        <a:rPr lang="en-US" altLang="zh-CN" dirty="0" smtClean="0"/>
+                        <a:t>4</a:t>
+                      </a:r>
+                      <a:endParaRPr lang="zh-CN" altLang="en-US" dirty="0"/>
+                    </a:p>
+                  </a:txBody>
+                  <a:tcPr/>
+                </a:tc>
+                <a:tc>
+                  <a:txBody>
+                    <a:bodyPr/>
+                    <a:lstStyle/>
+                    <a:p>
+                      <a:r>
+                        <a:rPr lang="en-US" altLang="zh-CN" dirty="0" smtClean="0">
+                          <a:solidFill>
+                            <a:schemeClr val="accent2"/>
+                          </a:solidFill>
+                        </a:rPr>
+                        <a:t>1</a:t>
+                      </a:r>
+                      <a:endParaRPr lang="zh-CN" altLang="en-US" dirty="0">
+                        <a:solidFill>
+                          <a:schemeClr val="accent2"/>
+                        </a:solidFill>
+                      </a:endParaRPr>
+                    </a:p>
+                  </a:txBody>
+                  <a:tcPr/>
+                </a:tc>
+                <a:tc>
+                  <a:txBody>
+                    <a:bodyPr/>
+                    <a:lstStyle/>
+                    <a:p>
+                      <a:r>
+                        <a:rPr lang="en-US" altLang="zh-CN" dirty="0" smtClean="0"/>
+                        <a:t>0</a:t>
+                      </a:r>
+                      <a:endParaRPr lang="zh-CN" altLang="en-US" dirty="0"/>
+                    </a:p>
+                  </a:txBody>
+                  <a:tcPr/>
+                </a:tc>
+                <a:tc>
+                  <a:txBody>
+                    <a:bodyPr/>
+                    <a:lstStyle/>
+                    <a:p>
+                      <a:r>
+                        <a:rPr lang="en-US" altLang="zh-CN" dirty="0" smtClean="0">
+                          <a:solidFill>
+                            <a:schemeClr val="accent2"/>
+                          </a:solidFill>
+                        </a:rPr>
+                        <a:t>0</a:t>
+                      </a:r>
+                      <a:endParaRPr lang="zh-CN" altLang="en-US" dirty="0">
+                        <a:solidFill>
+                          <a:schemeClr val="accent2"/>
+                        </a:solidFill>
+                      </a:endParaRPr>
+                    </a:p>
+                  </a:txBody>
+                  <a:tcPr/>
+                </a:tc>
+                <a:extLst>
+                  <a:ext uri="{0D108BD9-81ED-4DB2-BD59-A6C34878D82A}">
+                    <a16:rowId xmlns:a16="http://schemas.microsoft.com/office/drawing/2014/main" val="621721093"/>
+                  </a:ext>
+                </a:extLst>
+              </a:tr>
+              <a:tr h="370840">
+                <a:tc>
+                  <a:txBody>
+                    <a:bodyPr/>
+                    <a:lstStyle/>
+                    <a:p>
+                      <a:r>
+                        <a:rPr lang="en-US" altLang="zh-CN" b="1" dirty="0" smtClean="0"/>
+                        <a:t>|</a:t>
+                      </a:r>
+                      <a:r>
+                        <a:rPr lang="zh-CN" altLang="en-US" b="1" dirty="0" smtClean="0"/>
+                        <a:t>（位运算或）</a:t>
+                      </a:r>
+                      <a:r>
+                        <a:rPr lang="en-US" altLang="zh-CN" b="1" dirty="0" smtClean="0"/>
+                        <a:t>=7</a:t>
+                      </a:r>
+                      <a:endParaRPr lang="zh-CN" altLang="en-US" b="1" dirty="0"/>
+                    </a:p>
+                  </a:txBody>
+                  <a:tcPr/>
+                </a:tc>
+                <a:tc>
+                  <a:txBody>
+                    <a:bodyPr/>
+                    <a:lstStyle/>
+                    <a:p>
+                      <a:r>
+                        <a:rPr lang="en-US" altLang="zh-CN" dirty="0" smtClean="0">
+                          <a:solidFill>
+                            <a:schemeClr val="accent2"/>
+                          </a:solidFill>
+                        </a:rPr>
+                        <a:t>1</a:t>
+                      </a:r>
+                      <a:endParaRPr lang="zh-CN" altLang="en-US" dirty="0">
+                        <a:solidFill>
+                          <a:schemeClr val="accent2"/>
+                        </a:solidFill>
+                      </a:endParaRPr>
+                    </a:p>
+                  </a:txBody>
+                  <a:tcPr/>
+                </a:tc>
+                <a:tc>
+                  <a:txBody>
+                    <a:bodyPr/>
+                    <a:lstStyle/>
+                    <a:p>
+                      <a:r>
+                        <a:rPr lang="en-US" altLang="zh-CN" dirty="0" smtClean="0"/>
+                        <a:t>1</a:t>
+                      </a:r>
+                      <a:endParaRPr lang="zh-CN" altLang="en-US" dirty="0"/>
+                    </a:p>
+                  </a:txBody>
+                  <a:tcPr/>
+                </a:tc>
+                <a:tc>
+                  <a:txBody>
+                    <a:bodyPr/>
+                    <a:lstStyle/>
+                    <a:p>
+                      <a:r>
+                        <a:rPr lang="en-US" altLang="zh-CN" dirty="0" smtClean="0">
+                          <a:solidFill>
+                            <a:schemeClr val="accent2"/>
+                          </a:solidFill>
+                        </a:rPr>
+                        <a:t>1</a:t>
+                      </a:r>
+                      <a:endParaRPr lang="zh-CN" altLang="en-US" dirty="0">
+                        <a:solidFill>
+                          <a:schemeClr val="accent2"/>
+                        </a:solidFill>
+                      </a:endParaRPr>
+                    </a:p>
+                  </a:txBody>
+                  <a:tcPr/>
+                </a:tc>
+                <a:extLst>
+                  <a:ext uri="{0D108BD9-81ED-4DB2-BD59-A6C34878D82A}">
+                    <a16:rowId xmlns:a16="http://schemas.microsoft.com/office/drawing/2014/main" val="1722232880"/>
+                  </a:ext>
+                </a:extLst>
+              </a:tr>
+            </a:tbl>
+          </a:graphicData>
+        </a:graphic>
+      </p:graphicFrame>
+      <p:graphicFrame>
+        <p:nvGraphicFramePr>
+          <p:cNvPr id="4" name="表格 3"/>
+          <p:cNvGraphicFramePr>
+            <a:graphicFrameLocks noGrp="1"/>
+          </p:cNvGraphicFramePr>
+          <p:nvPr>
+            <p:extLst>
+              <p:ext uri="{D42A27DB-BD31-4B8C-83A1-F6EECF244321}">
+                <p14:modId xmlns:p14="http://schemas.microsoft.com/office/powerpoint/2010/main" val="2283252343"/>
+              </p:ext>
+            </p:extLst>
+          </p:nvPr>
+        </p:nvGraphicFramePr>
+        <p:xfrm>
+          <a:off x="1286933" y="3776133"/>
+          <a:ext cx="8128000" cy="1112520"/>
+        </p:xfrm>
+        <a:graphic>
+          <a:graphicData uri="http://schemas.openxmlformats.org/drawingml/2006/table">
+            <a:tbl>
+              <a:tblPr firstRow="1" bandRow="1">
+                <a:tableStyleId>{5C22544A-7EE6-4342-B048-85BDC9FD1C3A}</a:tableStyleId>
+              </a:tblPr>
+              <a:tblGrid>
+                <a:gridCol w="2032000">
+                  <a:extLst>
+                    <a:ext uri="{9D8B030D-6E8A-4147-A177-3AD203B41FA5}">
+                      <a16:colId xmlns:a16="http://schemas.microsoft.com/office/drawing/2014/main" val="296128195"/>
+                    </a:ext>
+                  </a:extLst>
+                </a:gridCol>
+                <a:gridCol w="2032000">
+                  <a:extLst>
+                    <a:ext uri="{9D8B030D-6E8A-4147-A177-3AD203B41FA5}">
+                      <a16:colId xmlns:a16="http://schemas.microsoft.com/office/drawing/2014/main" val="1485033215"/>
+                    </a:ext>
+                  </a:extLst>
+                </a:gridCol>
+                <a:gridCol w="2032000">
+                  <a:extLst>
+                    <a:ext uri="{9D8B030D-6E8A-4147-A177-3AD203B41FA5}">
+                      <a16:colId xmlns:a16="http://schemas.microsoft.com/office/drawing/2014/main" val="835095183"/>
+                    </a:ext>
+                  </a:extLst>
+                </a:gridCol>
+                <a:gridCol w="2032000">
+                  <a:extLst>
+                    <a:ext uri="{9D8B030D-6E8A-4147-A177-3AD203B41FA5}">
+                      <a16:colId xmlns:a16="http://schemas.microsoft.com/office/drawing/2014/main" val="2882123859"/>
+                    </a:ext>
+                  </a:extLst>
+                </a:gridCol>
+              </a:tblGrid>
+              <a:tr h="370840">
+                <a:tc>
+                  <a:txBody>
+                    <a:bodyPr/>
+                    <a:lstStyle/>
+                    <a:p>
+                      <a:r>
+                        <a:rPr lang="en-US" altLang="zh-CN" dirty="0" smtClean="0"/>
+                        <a:t>3</a:t>
+                      </a:r>
+                      <a:endParaRPr lang="zh-CN" altLang="en-US" dirty="0"/>
+                    </a:p>
+                  </a:txBody>
+                  <a:tcPr/>
+                </a:tc>
+                <a:tc>
+                  <a:txBody>
+                    <a:bodyPr/>
+                    <a:lstStyle/>
+                    <a:p>
+                      <a:r>
+                        <a:rPr lang="en-US" altLang="zh-CN" dirty="0" smtClean="0">
+                          <a:solidFill>
+                            <a:schemeClr val="accent2"/>
+                          </a:solidFill>
+                        </a:rPr>
+                        <a:t>0</a:t>
+                      </a:r>
+                      <a:endParaRPr lang="zh-CN" altLang="en-US" dirty="0">
+                        <a:solidFill>
+                          <a:schemeClr val="accent2"/>
+                        </a:solidFill>
+                      </a:endParaRPr>
+                    </a:p>
+                  </a:txBody>
+                  <a:tcPr/>
+                </a:tc>
+                <a:tc>
+                  <a:txBody>
+                    <a:bodyPr/>
+                    <a:lstStyle/>
+                    <a:p>
+                      <a:r>
+                        <a:rPr lang="en-US" altLang="zh-CN" dirty="0" smtClean="0"/>
+                        <a:t>1</a:t>
+                      </a:r>
+                      <a:endParaRPr lang="zh-CN" altLang="en-US" dirty="0"/>
+                    </a:p>
+                  </a:txBody>
+                  <a:tcPr/>
+                </a:tc>
+                <a:tc>
+                  <a:txBody>
+                    <a:bodyPr/>
+                    <a:lstStyle/>
+                    <a:p>
+                      <a:r>
+                        <a:rPr lang="en-US" altLang="zh-CN" dirty="0" smtClean="0">
+                          <a:solidFill>
+                            <a:schemeClr val="accent2"/>
+                          </a:solidFill>
+                        </a:rPr>
+                        <a:t>1</a:t>
+                      </a:r>
+                      <a:endParaRPr lang="zh-CN" altLang="en-US" dirty="0">
+                        <a:solidFill>
+                          <a:schemeClr val="accent2"/>
+                        </a:solidFill>
+                      </a:endParaRPr>
+                    </a:p>
+                  </a:txBody>
+                  <a:tcPr/>
+                </a:tc>
+                <a:extLst>
+                  <a:ext uri="{0D108BD9-81ED-4DB2-BD59-A6C34878D82A}">
+                    <a16:rowId xmlns:a16="http://schemas.microsoft.com/office/drawing/2014/main" val="2583744908"/>
+                  </a:ext>
+                </a:extLst>
+              </a:tr>
+              <a:tr h="370840">
+                <a:tc>
+                  <a:txBody>
+                    <a:bodyPr/>
+                    <a:lstStyle/>
+                    <a:p>
+                      <a:r>
+                        <a:rPr lang="en-US" altLang="zh-CN" dirty="0" smtClean="0"/>
+                        <a:t>4</a:t>
+                      </a:r>
+                      <a:endParaRPr lang="zh-CN" altLang="en-US" dirty="0"/>
+                    </a:p>
+                  </a:txBody>
+                  <a:tcPr/>
+                </a:tc>
+                <a:tc>
+                  <a:txBody>
+                    <a:bodyPr/>
+                    <a:lstStyle/>
+                    <a:p>
+                      <a:r>
+                        <a:rPr lang="en-US" altLang="zh-CN" dirty="0" smtClean="0">
+                          <a:solidFill>
+                            <a:schemeClr val="accent2"/>
+                          </a:solidFill>
+                        </a:rPr>
+                        <a:t>1</a:t>
+                      </a:r>
+                      <a:endParaRPr lang="zh-CN" altLang="en-US" dirty="0">
+                        <a:solidFill>
+                          <a:schemeClr val="accent2"/>
+                        </a:solidFill>
+                      </a:endParaRPr>
+                    </a:p>
+                  </a:txBody>
+                  <a:tcPr/>
+                </a:tc>
+                <a:tc>
+                  <a:txBody>
+                    <a:bodyPr/>
+                    <a:lstStyle/>
+                    <a:p>
+                      <a:r>
+                        <a:rPr lang="en-US" altLang="zh-CN" dirty="0" smtClean="0"/>
+                        <a:t>0</a:t>
+                      </a:r>
+                      <a:endParaRPr lang="zh-CN" altLang="en-US" dirty="0"/>
+                    </a:p>
+                  </a:txBody>
+                  <a:tcPr/>
+                </a:tc>
+                <a:tc>
+                  <a:txBody>
+                    <a:bodyPr/>
+                    <a:lstStyle/>
+                    <a:p>
+                      <a:r>
+                        <a:rPr lang="en-US" altLang="zh-CN" dirty="0" smtClean="0">
+                          <a:solidFill>
+                            <a:schemeClr val="accent2"/>
+                          </a:solidFill>
+                        </a:rPr>
+                        <a:t>0</a:t>
+                      </a:r>
+                      <a:endParaRPr lang="zh-CN" altLang="en-US" dirty="0">
+                        <a:solidFill>
+                          <a:schemeClr val="accent2"/>
+                        </a:solidFill>
+                      </a:endParaRPr>
+                    </a:p>
+                  </a:txBody>
+                  <a:tcPr/>
+                </a:tc>
+                <a:extLst>
+                  <a:ext uri="{0D108BD9-81ED-4DB2-BD59-A6C34878D82A}">
+                    <a16:rowId xmlns:a16="http://schemas.microsoft.com/office/drawing/2014/main" val="621721093"/>
+                  </a:ext>
+                </a:extLst>
+              </a:tr>
+              <a:tr h="370840">
+                <a:tc>
+                  <a:txBody>
+                    <a:bodyPr/>
+                    <a:lstStyle/>
+                    <a:p>
+                      <a:r>
+                        <a:rPr lang="en-US" altLang="zh-CN" b="1" dirty="0" smtClean="0"/>
+                        <a:t>&amp;</a:t>
+                      </a:r>
+                      <a:r>
+                        <a:rPr lang="zh-CN" altLang="en-US" b="1" dirty="0" smtClean="0"/>
+                        <a:t>（位运算与）</a:t>
+                      </a:r>
+                      <a:r>
+                        <a:rPr lang="en-US" altLang="zh-CN" b="1" dirty="0" smtClean="0"/>
+                        <a:t>=0</a:t>
+                      </a:r>
+                      <a:endParaRPr lang="zh-CN" altLang="en-US" b="1" dirty="0"/>
+                    </a:p>
+                  </a:txBody>
+                  <a:tcPr/>
+                </a:tc>
+                <a:tc>
+                  <a:txBody>
+                    <a:bodyPr/>
+                    <a:lstStyle/>
+                    <a:p>
+                      <a:r>
+                        <a:rPr lang="en-US" altLang="zh-CN" dirty="0" smtClean="0">
+                          <a:solidFill>
+                            <a:schemeClr val="accent2"/>
+                          </a:solidFill>
+                        </a:rPr>
+                        <a:t>0</a:t>
+                      </a:r>
+                      <a:endParaRPr lang="zh-CN" altLang="en-US" dirty="0">
+                        <a:solidFill>
+                          <a:schemeClr val="accent2"/>
+                        </a:solidFill>
+                      </a:endParaRPr>
+                    </a:p>
+                  </a:txBody>
+                  <a:tcPr/>
+                </a:tc>
+                <a:tc>
+                  <a:txBody>
+                    <a:bodyPr/>
+                    <a:lstStyle/>
+                    <a:p>
+                      <a:r>
+                        <a:rPr lang="en-US" altLang="zh-CN" dirty="0" smtClean="0"/>
+                        <a:t>0</a:t>
+                      </a:r>
+                      <a:endParaRPr lang="zh-CN" altLang="en-US" dirty="0"/>
+                    </a:p>
+                  </a:txBody>
+                  <a:tcPr/>
+                </a:tc>
+                <a:tc>
+                  <a:txBody>
+                    <a:bodyPr/>
+                    <a:lstStyle/>
+                    <a:p>
+                      <a:r>
+                        <a:rPr lang="en-US" altLang="zh-CN" dirty="0" smtClean="0">
+                          <a:solidFill>
+                            <a:schemeClr val="accent2"/>
+                          </a:solidFill>
+                        </a:rPr>
+                        <a:t>0</a:t>
+                      </a:r>
+                      <a:endParaRPr lang="zh-CN" altLang="en-US" dirty="0">
+                        <a:solidFill>
+                          <a:schemeClr val="accent2"/>
+                        </a:solidFill>
+                      </a:endParaRPr>
+                    </a:p>
+                  </a:txBody>
+                  <a:tcPr/>
+                </a:tc>
+                <a:extLst>
+                  <a:ext uri="{0D108BD9-81ED-4DB2-BD59-A6C34878D82A}">
+                    <a16:rowId xmlns:a16="http://schemas.microsoft.com/office/drawing/2014/main" val="3517284591"/>
+                  </a:ext>
+                </a:extLst>
+              </a:tr>
+            </a:tbl>
+          </a:graphicData>
+        </a:graphic>
+      </p:graphicFrame>
+    </p:spTree>
+    <p:extLst>
+      <p:ext uri="{BB962C8B-B14F-4D97-AF65-F5344CB8AC3E}">
+        <p14:creationId xmlns:p14="http://schemas.microsoft.com/office/powerpoint/2010/main" val="3522423005"/>
+      </p:ext>
+    </p:extLst>
+  </p:cSld>
+  <p:clrMapOvr>
+    <a:masterClrMapping/>
+  </p:clrMapOvr>
+</p:sld>
+</file>
+
 <file path=ppt/slides/slide3.xml><?xml version="1.0" encoding="utf-8"?>
 <p:sld xmlns:a="http://schemas.openxmlformats.org/drawingml/2006/main" xmlns:r="http://schemas.openxmlformats.org/officeDocument/2006/relationships" xmlns:p="http://schemas.openxmlformats.org/presentationml/2006/main">
   <p:cSld>
@@ -12727,16 +14226,7 @@
                 <a:cs typeface="Noto Sans SC"/>
                 <a:sym typeface="Noto Sans SC"/>
               </a:rPr>
-              <a:t>程序的内存布局：</a:t>
-            </a:r>
-            <a:r>
-              <a:rPr lang="en-US" altLang="zh-CN" sz="3200" b="1" dirty="0" err="1" smtClean="0">
-                <a:latin typeface="Noto Sans SC"/>
-                <a:ea typeface="Noto Sans SC"/>
-                <a:cs typeface="Noto Sans SC"/>
-                <a:sym typeface="Noto Sans SC"/>
-              </a:rPr>
-              <a:t>餐厅比喻</a:t>
+              <a:t>程序的内存布局：餐厅比喻</a:t>
             </a:r>
             <a:r>
               <a:rPr lang="zh-CN" altLang="en-US" sz="3200" b="1" dirty="0" smtClean="0">
@@ -12993,7 +14483,7 @@
                 <a14:useLocalDpi xmlns:a14="http://schemas.microsoft.com/office/drawing/2010/main" val="0"/>
               </a:ext>
               <a:ext uri="{96DAC541-7B7A-43D3-8B79-37D633B846F1}">
-                <asvg:svgBlip xmlns:asvg="http://schemas.microsoft.com/office/drawing/2016/SVG/main" xmlns="" r:embed="rId6"/>
+                <asvg:svgBlip xmlns="" xmlns:asvg="http://schemas.microsoft.com/office/drawing/2016/SVG/main" r:embed="rId6"/>
               </a:ext>
             </a:extLst>
           </a:blip>
@@ -13188,7 +14678,7 @@
                 <a14:useLocalDpi xmlns:a14="http://schemas.microsoft.com/office/drawing/2010/main" val="0"/>
               </a:ext>
               <a:ext uri="{96DAC541-7B7A-43D3-8B79-37D633B846F1}">
-                <asvg:svgBlip xmlns:asvg="http://schemas.microsoft.com/office/drawing/2016/SVG/main" xmlns="" r:embed="rId8"/>
+                <asvg:svgBlip xmlns="" xmlns:asvg="http://schemas.microsoft.com/office/drawing/2016/SVG/main" r:embed="rId8"/>
               </a:ext>
             </a:extLst>
           </a:blip>
@@ -13383,7 +14873,7 @@
                 <a14:useLocalDpi xmlns:a14="http://schemas.microsoft.com/office/drawing/2010/main" val="0"/>
               </a:ext>
               <a:ext uri="{96DAC541-7B7A-43D3-8B79-37D633B846F1}">
-                <asvg:svgBlip xmlns:asvg="http://schemas.microsoft.com/office/drawing/2016/SVG/main" xmlns="" r:embed="rId10"/>
+                <asvg:svgBlip xmlns="" xmlns:asvg="http://schemas.microsoft.com/office/drawing/2016/SVG/main" r:embed="rId10"/>
               </a:ext>
             </a:extLst>
           </a:blip>
@@ -13578,7 +15068,7 @@
                 <a14:useLocalDpi xmlns:a14="http://schemas.microsoft.com/office/drawing/2010/main" val="0"/>
               </a:ext>
               <a:ext uri="{96DAC541-7B7A-43D3-8B79-37D633B846F1}">
-                <asvg:svgBlip xmlns:asvg="http://schemas.microsoft.com/office/drawing/2016/SVG/main" xmlns="" r:embed="rId12"/>
+                <asvg:svgBlip xmlns="" xmlns:asvg="http://schemas.microsoft.com/office/drawing/2016/SVG/main" r:embed="rId12"/>
               </a:ext>
             </a:extLst>
           </a:blip>
@@ -13871,7 +15361,7 @@
                 <a14:useLocalDpi xmlns:a14="http://schemas.microsoft.com/office/drawing/2010/main" val="0"/>
               </a:ext>
               <a:ext uri="{96DAC541-7B7A-43D3-8B79-37D633B846F1}">
-                <asvg:svgBlip xmlns:asvg="http://schemas.microsoft.com/office/drawing/2016/SVG/main" xmlns="" r:embed="rId5"/>
+                <asvg:svgBlip xmlns="" xmlns:asvg="http://schemas.microsoft.com/office/drawing/2016/SVG/main" r:embed="rId5"/>
               </a:ext>
             </a:extLst>
           </a:blip>
@@ -14169,7 +15659,7 @@
                 <a14:useLocalDpi xmlns:a14="http://schemas.microsoft.com/office/drawing/2010/main" val="0"/>
               </a:ext>
               <a:ext uri="{96DAC541-7B7A-43D3-8B79-37D633B846F1}">
-                <asvg:svgBlip xmlns:asvg="http://schemas.microsoft.com/office/drawing/2016/SVG/main" xmlns="" r:embed="rId7"/>
+                <asvg:svgBlip xmlns="" xmlns:asvg="http://schemas.microsoft.com/office/drawing/2016/SVG/main" r:embed="rId7"/>
               </a:ext>
             </a:extLst>
           </a:blip>
@@ -14648,16 +16138,7 @@
                 <a:cs typeface="Noto Sans SC"/>
                 <a:sym typeface="Noto Sans SC"/>
               </a:rPr>
-              <a:t>（</a:t>
-            </a:r>
-            <a:r>
-              <a:rPr lang="zh-CN" altLang="en-US" sz="3200" b="1" dirty="0" smtClean="0">
-                <a:latin typeface="Noto Sans SC"/>
-                <a:ea typeface="Noto Sans SC"/>
-                <a:cs typeface="Noto Sans SC"/>
-                <a:sym typeface="Noto Sans SC"/>
-              </a:rPr>
-              <a:t>了解）</a:t>
+              <a:t>（了解）</a:t>
             </a:r>
             <a:endParaRPr lang="en-US" altLang="zh-CN" sz="3200" b="1" dirty="0">
               <a:latin typeface="Noto Sans SC"/>
@@ -14794,7 +16275,7 @@
                 <a14:useLocalDpi xmlns:a14="http://schemas.microsoft.com/office/drawing/2010/main" val="0"/>
               </a:ext>
               <a:ext uri="{96DAC541-7B7A-43D3-8B79-37D633B846F1}">
-                <asvg:svgBlip xmlns:asvg="http://schemas.microsoft.com/office/drawing/2016/SVG/main" xmlns="" r:embed="rId6"/>
+                <asvg:svgBlip xmlns="" xmlns:asvg="http://schemas.microsoft.com/office/drawing/2016/SVG/main" r:embed="rId6"/>
               </a:ext>
             </a:extLst>
           </a:blip>
@@ -14887,7 +16368,7 @@
                 <a14:useLocalDpi xmlns:a14="http://schemas.microsoft.com/office/drawing/2010/main" val="0"/>
               </a:ext>
               <a:ext uri="{96DAC541-7B7A-43D3-8B79-37D633B846F1}">
-                <asvg:svgBlip xmlns:asvg="http://schemas.microsoft.com/office/drawing/2016/SVG/main" xmlns="" r:embed="rId8"/>
+                <asvg:svgBlip xmlns="" xmlns:asvg="http://schemas.microsoft.com/office/drawing/2016/SVG/main" r:embed="rId8"/>
               </a:ext>
             </a:extLst>
           </a:blip>
@@ -15054,7 +16535,7 @@
                 <a14:useLocalDpi xmlns:a14="http://schemas.microsoft.com/office/drawing/2010/main" val="0"/>
               </a:ext>
               <a:ext uri="{96DAC541-7B7A-43D3-8B79-37D633B846F1}">
-                <asvg:svgBlip xmlns:asvg="http://schemas.microsoft.com/office/drawing/2016/SVG/main" xmlns="" r:embed="rId10"/>
+                <asvg:svgBlip xmlns="" xmlns:asvg="http://schemas.microsoft.com/office/drawing/2016/SVG/main" r:embed="rId10"/>
               </a:ext>
             </a:extLst>
           </a:blip>
@@ -15189,7 +16670,7 @@
                 <a14:useLocalDpi xmlns:a14="http://schemas.microsoft.com/office/drawing/2010/main" val="0"/>
               </a:ext>
               <a:ext uri="{96DAC541-7B7A-43D3-8B79-37D633B846F1}">
-                <asvg:svgBlip xmlns:asvg="http://schemas.microsoft.com/office/drawing/2016/SVG/main" xmlns="" r:embed="rId12"/>
+                <asvg:svgBlip xmlns="" xmlns:asvg="http://schemas.microsoft.com/office/drawing/2016/SVG/main" r:embed="rId12"/>
               </a:ext>
             </a:extLst>
           </a:blip>
@@ -15360,7 +16841,7 @@
                 <a14:useLocalDpi xmlns:a14="http://schemas.microsoft.com/office/drawing/2010/main" val="0"/>
               </a:ext>
               <a:ext uri="{96DAC541-7B7A-43D3-8B79-37D633B846F1}">
-                <asvg:svgBlip xmlns:asvg="http://schemas.microsoft.com/office/drawing/2016/SVG/main" xmlns="" r:embed="rId14"/>
+                <asvg:svgBlip xmlns="" xmlns:asvg="http://schemas.microsoft.com/office/drawing/2016/SVG/main" r:embed="rId14"/>
               </a:ext>
             </a:extLst>
           </a:blip>
